--- a/Docs/Sesión_4_MFDL.pptx
+++ b/Docs/Sesión_4_MFDL.pptx
@@ -8,8 +8,7 @@
     <p:sldId id="256" r:id="rId2"/>
     <p:sldId id="259" r:id="rId3"/>
     <p:sldId id="260" r:id="rId4"/>
-    <p:sldId id="272" r:id="rId5"/>
-    <p:sldId id="270" r:id="rId6"/>
+    <p:sldId id="270" r:id="rId5"/>
   </p:sldIdLst>
   <p:sldSz cx="12192000" cy="6858000"/>
   <p:notesSz cx="6858000" cy="9144000"/>
@@ -1642,6 +1641,498 @@
       <dsp:cNvGrpSpPr/>
     </dsp:nvGrpSpPr>
     <dsp:grpSpPr/>
+    <dsp:sp modelId="{D35F3287-6F6B-4B96-A2F5-B2A6012A195F}">
+      <dsp:nvSpPr>
+        <dsp:cNvPr id="0" name=""/>
+        <dsp:cNvSpPr/>
+      </dsp:nvSpPr>
+      <dsp:spPr>
+        <a:xfrm>
+          <a:off x="2275785" y="0"/>
+          <a:ext cx="910314" cy="606454"/>
+        </a:xfrm>
+        <a:prstGeom prst="trapezoid">
+          <a:avLst>
+            <a:gd name="adj" fmla="val 75052"/>
+          </a:avLst>
+        </a:prstGeom>
+        <a:solidFill>
+          <a:schemeClr val="accent2">
+            <a:hueOff val="0"/>
+            <a:satOff val="0"/>
+            <a:lumOff val="0"/>
+            <a:alphaOff val="0"/>
+          </a:schemeClr>
+        </a:solidFill>
+        <a:ln w="12700" cap="flat" cmpd="sng" algn="ctr">
+          <a:solidFill>
+            <a:schemeClr val="lt1">
+              <a:hueOff val="0"/>
+              <a:satOff val="0"/>
+              <a:lumOff val="0"/>
+              <a:alphaOff val="0"/>
+            </a:schemeClr>
+          </a:solidFill>
+          <a:prstDash val="solid"/>
+          <a:miter lim="800000"/>
+        </a:ln>
+        <a:effectLst/>
+      </dsp:spPr>
+      <dsp:style>
+        <a:lnRef idx="2">
+          <a:scrgbClr r="0" g="0" b="0"/>
+        </a:lnRef>
+        <a:fillRef idx="1">
+          <a:scrgbClr r="0" g="0" b="0"/>
+        </a:fillRef>
+        <a:effectRef idx="0">
+          <a:scrgbClr r="0" g="0" b="0"/>
+        </a:effectRef>
+        <a:fontRef idx="minor">
+          <a:schemeClr val="lt1"/>
+        </a:fontRef>
+      </dsp:style>
+      <dsp:txBody>
+        <a:bodyPr spcFirstLastPara="0" vert="horz" wrap="square" lIns="13970" tIns="13970" rIns="13970" bIns="13970" numCol="1" spcCol="1270" anchor="ctr" anchorCtr="0">
+          <a:noAutofit/>
+        </a:bodyPr>
+        <a:lstStyle/>
+        <a:p>
+          <a:pPr lvl="0" algn="ctr" defTabSz="488950">
+            <a:lnSpc>
+              <a:spcPct val="90000"/>
+            </a:lnSpc>
+            <a:spcBef>
+              <a:spcPct val="0"/>
+            </a:spcBef>
+            <a:spcAft>
+              <a:spcPct val="35000"/>
+            </a:spcAft>
+          </a:pPr>
+          <a:r>
+            <a:rPr lang="es-MX" sz="1100" kern="1200" dirty="0" smtClean="0"/>
+            <a:t>Temas</a:t>
+          </a:r>
+          <a:endParaRPr lang="es-MX" sz="1400" kern="1200" dirty="0"/>
+        </a:p>
+      </dsp:txBody>
+      <dsp:txXfrm>
+        <a:off x="2275785" y="0"/>
+        <a:ext cx="910314" cy="606454"/>
+      </dsp:txXfrm>
+    </dsp:sp>
+    <dsp:sp modelId="{EA7E1869-AC6F-4D7C-8EBE-E93A117DEE3B}">
+      <dsp:nvSpPr>
+        <dsp:cNvPr id="0" name=""/>
+        <dsp:cNvSpPr/>
+      </dsp:nvSpPr>
+      <dsp:spPr>
+        <a:xfrm>
+          <a:off x="1820628" y="606454"/>
+          <a:ext cx="1820628" cy="606454"/>
+        </a:xfrm>
+        <a:prstGeom prst="trapezoid">
+          <a:avLst>
+            <a:gd name="adj" fmla="val 75052"/>
+          </a:avLst>
+        </a:prstGeom>
+        <a:solidFill>
+          <a:schemeClr val="accent3">
+            <a:hueOff val="0"/>
+            <a:satOff val="0"/>
+            <a:lumOff val="0"/>
+            <a:alphaOff val="0"/>
+          </a:schemeClr>
+        </a:solidFill>
+        <a:ln w="12700" cap="flat" cmpd="sng" algn="ctr">
+          <a:solidFill>
+            <a:schemeClr val="lt1">
+              <a:hueOff val="0"/>
+              <a:satOff val="0"/>
+              <a:lumOff val="0"/>
+              <a:alphaOff val="0"/>
+            </a:schemeClr>
+          </a:solidFill>
+          <a:prstDash val="solid"/>
+          <a:miter lim="800000"/>
+        </a:ln>
+        <a:effectLst/>
+      </dsp:spPr>
+      <dsp:style>
+        <a:lnRef idx="2">
+          <a:scrgbClr r="0" g="0" b="0"/>
+        </a:lnRef>
+        <a:fillRef idx="1">
+          <a:scrgbClr r="0" g="0" b="0"/>
+        </a:fillRef>
+        <a:effectRef idx="0">
+          <a:scrgbClr r="0" g="0" b="0"/>
+        </a:effectRef>
+        <a:fontRef idx="minor">
+          <a:schemeClr val="lt1"/>
+        </a:fontRef>
+      </dsp:style>
+      <dsp:txBody>
+        <a:bodyPr spcFirstLastPara="0" vert="horz" wrap="square" lIns="35560" tIns="35560" rIns="35560" bIns="35560" numCol="1" spcCol="1270" anchor="ctr" anchorCtr="0">
+          <a:noAutofit/>
+        </a:bodyPr>
+        <a:lstStyle/>
+        <a:p>
+          <a:pPr lvl="0" algn="ctr" defTabSz="1244600">
+            <a:lnSpc>
+              <a:spcPct val="90000"/>
+            </a:lnSpc>
+            <a:spcBef>
+              <a:spcPct val="0"/>
+            </a:spcBef>
+            <a:spcAft>
+              <a:spcPct val="35000"/>
+            </a:spcAft>
+          </a:pPr>
+          <a:r>
+            <a:rPr lang="es-MX" sz="2800" kern="1200" dirty="0" smtClean="0"/>
+            <a:t>Facetas</a:t>
+          </a:r>
+          <a:endParaRPr lang="es-MX" sz="2800" kern="1200" dirty="0"/>
+        </a:p>
+      </dsp:txBody>
+      <dsp:txXfrm>
+        <a:off x="2139238" y="606454"/>
+        <a:ext cx="1183408" cy="606454"/>
+      </dsp:txXfrm>
+    </dsp:sp>
+    <dsp:sp modelId="{CD0ACCF6-FEA4-4E64-B6D4-5E68A80BC2BB}">
+      <dsp:nvSpPr>
+        <dsp:cNvPr id="0" name=""/>
+        <dsp:cNvSpPr/>
+      </dsp:nvSpPr>
+      <dsp:spPr>
+        <a:xfrm>
+          <a:off x="1365471" y="1212908"/>
+          <a:ext cx="2730942" cy="606454"/>
+        </a:xfrm>
+        <a:prstGeom prst="trapezoid">
+          <a:avLst>
+            <a:gd name="adj" fmla="val 75052"/>
+          </a:avLst>
+        </a:prstGeom>
+        <a:solidFill>
+          <a:schemeClr val="accent4">
+            <a:hueOff val="0"/>
+            <a:satOff val="0"/>
+            <a:lumOff val="0"/>
+            <a:alphaOff val="0"/>
+          </a:schemeClr>
+        </a:solidFill>
+        <a:ln w="12700" cap="flat" cmpd="sng" algn="ctr">
+          <a:solidFill>
+            <a:schemeClr val="lt1">
+              <a:hueOff val="0"/>
+              <a:satOff val="0"/>
+              <a:lumOff val="0"/>
+              <a:alphaOff val="0"/>
+            </a:schemeClr>
+          </a:solidFill>
+          <a:prstDash val="solid"/>
+          <a:miter lim="800000"/>
+        </a:ln>
+        <a:effectLst/>
+      </dsp:spPr>
+      <dsp:style>
+        <a:lnRef idx="2">
+          <a:scrgbClr r="0" g="0" b="0"/>
+        </a:lnRef>
+        <a:fillRef idx="1">
+          <a:scrgbClr r="0" g="0" b="0"/>
+        </a:fillRef>
+        <a:effectRef idx="0">
+          <a:scrgbClr r="0" g="0" b="0"/>
+        </a:effectRef>
+        <a:fontRef idx="minor">
+          <a:schemeClr val="lt1"/>
+        </a:fontRef>
+      </dsp:style>
+      <dsp:txBody>
+        <a:bodyPr spcFirstLastPara="0" vert="horz" wrap="square" lIns="35560" tIns="35560" rIns="35560" bIns="35560" numCol="1" spcCol="1270" anchor="ctr" anchorCtr="0">
+          <a:noAutofit/>
+        </a:bodyPr>
+        <a:lstStyle/>
+        <a:p>
+          <a:pPr lvl="0" algn="ctr" defTabSz="1244600">
+            <a:lnSpc>
+              <a:spcPct val="90000"/>
+            </a:lnSpc>
+            <a:spcBef>
+              <a:spcPct val="0"/>
+            </a:spcBef>
+            <a:spcAft>
+              <a:spcPct val="35000"/>
+            </a:spcAft>
+          </a:pPr>
+          <a:r>
+            <a:rPr lang="es-MX" sz="2800" kern="1200" dirty="0" smtClean="0"/>
+            <a:t>Escalas</a:t>
+          </a:r>
+          <a:endParaRPr lang="es-MX" sz="2800" kern="1200" dirty="0"/>
+        </a:p>
+      </dsp:txBody>
+      <dsp:txXfrm>
+        <a:off x="1843386" y="1212908"/>
+        <a:ext cx="1775112" cy="606454"/>
+      </dsp:txXfrm>
+    </dsp:sp>
+    <dsp:sp modelId="{13E52E1D-F5DA-49DF-817D-E628D3F481C4}">
+      <dsp:nvSpPr>
+        <dsp:cNvPr id="0" name=""/>
+        <dsp:cNvSpPr/>
+      </dsp:nvSpPr>
+      <dsp:spPr>
+        <a:xfrm>
+          <a:off x="910314" y="1819362"/>
+          <a:ext cx="3641256" cy="606454"/>
+        </a:xfrm>
+        <a:prstGeom prst="trapezoid">
+          <a:avLst>
+            <a:gd name="adj" fmla="val 75052"/>
+          </a:avLst>
+        </a:prstGeom>
+        <a:solidFill>
+          <a:schemeClr val="accent5">
+            <a:hueOff val="0"/>
+            <a:satOff val="0"/>
+            <a:lumOff val="0"/>
+            <a:alphaOff val="0"/>
+          </a:schemeClr>
+        </a:solidFill>
+        <a:ln w="12700" cap="flat" cmpd="sng" algn="ctr">
+          <a:solidFill>
+            <a:schemeClr val="lt1">
+              <a:hueOff val="0"/>
+              <a:satOff val="0"/>
+              <a:lumOff val="0"/>
+              <a:alphaOff val="0"/>
+            </a:schemeClr>
+          </a:solidFill>
+          <a:prstDash val="solid"/>
+          <a:miter lim="800000"/>
+        </a:ln>
+        <a:effectLst/>
+      </dsp:spPr>
+      <dsp:style>
+        <a:lnRef idx="2">
+          <a:scrgbClr r="0" g="0" b="0"/>
+        </a:lnRef>
+        <a:fillRef idx="1">
+          <a:scrgbClr r="0" g="0" b="0"/>
+        </a:fillRef>
+        <a:effectRef idx="0">
+          <a:scrgbClr r="0" g="0" b="0"/>
+        </a:effectRef>
+        <a:fontRef idx="minor">
+          <a:schemeClr val="lt1"/>
+        </a:fontRef>
+      </dsp:style>
+      <dsp:txBody>
+        <a:bodyPr spcFirstLastPara="0" vert="horz" wrap="square" lIns="35560" tIns="35560" rIns="35560" bIns="35560" numCol="1" spcCol="1270" anchor="ctr" anchorCtr="0">
+          <a:noAutofit/>
+        </a:bodyPr>
+        <a:lstStyle/>
+        <a:p>
+          <a:pPr lvl="0" algn="ctr" defTabSz="1244600">
+            <a:lnSpc>
+              <a:spcPct val="90000"/>
+            </a:lnSpc>
+            <a:spcBef>
+              <a:spcPct val="0"/>
+            </a:spcBef>
+            <a:spcAft>
+              <a:spcPct val="35000"/>
+            </a:spcAft>
+          </a:pPr>
+          <a:r>
+            <a:rPr lang="es-MX" sz="2800" kern="1200" dirty="0" smtClean="0"/>
+            <a:t>Geometrías</a:t>
+          </a:r>
+          <a:endParaRPr lang="es-MX" sz="2800" kern="1200" dirty="0"/>
+        </a:p>
+      </dsp:txBody>
+      <dsp:txXfrm>
+        <a:off x="1547534" y="1819362"/>
+        <a:ext cx="2366816" cy="606454"/>
+      </dsp:txXfrm>
+    </dsp:sp>
+    <dsp:sp modelId="{C322A5A9-947A-43A1-82D8-194BD2BA4246}">
+      <dsp:nvSpPr>
+        <dsp:cNvPr id="0" name=""/>
+        <dsp:cNvSpPr/>
+      </dsp:nvSpPr>
+      <dsp:spPr>
+        <a:xfrm>
+          <a:off x="455157" y="2425815"/>
+          <a:ext cx="4551570" cy="606454"/>
+        </a:xfrm>
+        <a:prstGeom prst="trapezoid">
+          <a:avLst>
+            <a:gd name="adj" fmla="val 75052"/>
+          </a:avLst>
+        </a:prstGeom>
+        <a:solidFill>
+          <a:schemeClr val="accent6">
+            <a:hueOff val="0"/>
+            <a:satOff val="0"/>
+            <a:lumOff val="0"/>
+            <a:alphaOff val="0"/>
+          </a:schemeClr>
+        </a:solidFill>
+        <a:ln w="12700" cap="flat" cmpd="sng" algn="ctr">
+          <a:solidFill>
+            <a:schemeClr val="lt1">
+              <a:hueOff val="0"/>
+              <a:satOff val="0"/>
+              <a:lumOff val="0"/>
+              <a:alphaOff val="0"/>
+            </a:schemeClr>
+          </a:solidFill>
+          <a:prstDash val="solid"/>
+          <a:miter lim="800000"/>
+        </a:ln>
+        <a:effectLst/>
+      </dsp:spPr>
+      <dsp:style>
+        <a:lnRef idx="2">
+          <a:scrgbClr r="0" g="0" b="0"/>
+        </a:lnRef>
+        <a:fillRef idx="1">
+          <a:scrgbClr r="0" g="0" b="0"/>
+        </a:fillRef>
+        <a:effectRef idx="0">
+          <a:scrgbClr r="0" g="0" b="0"/>
+        </a:effectRef>
+        <a:fontRef idx="minor">
+          <a:schemeClr val="lt1"/>
+        </a:fontRef>
+      </dsp:style>
+      <dsp:txBody>
+        <a:bodyPr spcFirstLastPara="0" vert="horz" wrap="square" lIns="35560" tIns="35560" rIns="35560" bIns="35560" numCol="1" spcCol="1270" anchor="ctr" anchorCtr="0">
+          <a:noAutofit/>
+        </a:bodyPr>
+        <a:lstStyle/>
+        <a:p>
+          <a:pPr lvl="0" algn="ctr" defTabSz="1244600">
+            <a:lnSpc>
+              <a:spcPct val="90000"/>
+            </a:lnSpc>
+            <a:spcBef>
+              <a:spcPct val="0"/>
+            </a:spcBef>
+            <a:spcAft>
+              <a:spcPct val="35000"/>
+            </a:spcAft>
+          </a:pPr>
+          <a:r>
+            <a:rPr lang="es-MX" sz="2800" kern="1200" dirty="0" smtClean="0">
+              <a:solidFill>
+                <a:schemeClr val="bg1">
+                  <a:lumMod val="75000"/>
+                </a:schemeClr>
+              </a:solidFill>
+            </a:rPr>
+            <a:t>Estéticas (aes)</a:t>
+          </a:r>
+          <a:endParaRPr lang="es-MX" sz="2800" kern="1200" dirty="0">
+            <a:solidFill>
+              <a:schemeClr val="bg1">
+                <a:lumMod val="75000"/>
+              </a:schemeClr>
+            </a:solidFill>
+          </a:endParaRPr>
+        </a:p>
+      </dsp:txBody>
+      <dsp:txXfrm>
+        <a:off x="1251681" y="2425815"/>
+        <a:ext cx="2958521" cy="606454"/>
+      </dsp:txXfrm>
+    </dsp:sp>
+    <dsp:sp modelId="{66D3CA2F-1BFA-42C1-A938-B7571E249809}">
+      <dsp:nvSpPr>
+        <dsp:cNvPr id="0" name=""/>
+        <dsp:cNvSpPr/>
+      </dsp:nvSpPr>
+      <dsp:spPr>
+        <a:xfrm>
+          <a:off x="0" y="3032269"/>
+          <a:ext cx="5461885" cy="606454"/>
+        </a:xfrm>
+        <a:prstGeom prst="trapezoid">
+          <a:avLst>
+            <a:gd name="adj" fmla="val 75052"/>
+          </a:avLst>
+        </a:prstGeom>
+        <a:solidFill>
+          <a:schemeClr val="accent2">
+            <a:hueOff val="0"/>
+            <a:satOff val="0"/>
+            <a:lumOff val="0"/>
+            <a:alphaOff val="0"/>
+          </a:schemeClr>
+        </a:solidFill>
+        <a:ln w="12700" cap="flat" cmpd="sng" algn="ctr">
+          <a:solidFill>
+            <a:schemeClr val="lt1">
+              <a:hueOff val="0"/>
+              <a:satOff val="0"/>
+              <a:lumOff val="0"/>
+              <a:alphaOff val="0"/>
+            </a:schemeClr>
+          </a:solidFill>
+          <a:prstDash val="solid"/>
+          <a:miter lim="800000"/>
+        </a:ln>
+        <a:effectLst/>
+      </dsp:spPr>
+      <dsp:style>
+        <a:lnRef idx="2">
+          <a:scrgbClr r="0" g="0" b="0"/>
+        </a:lnRef>
+        <a:fillRef idx="1">
+          <a:scrgbClr r="0" g="0" b="0"/>
+        </a:fillRef>
+        <a:effectRef idx="0">
+          <a:scrgbClr r="0" g="0" b="0"/>
+        </a:effectRef>
+        <a:fontRef idx="minor">
+          <a:schemeClr val="lt1"/>
+        </a:fontRef>
+      </dsp:style>
+      <dsp:txBody>
+        <a:bodyPr spcFirstLastPara="0" vert="horz" wrap="square" lIns="35560" tIns="35560" rIns="35560" bIns="35560" numCol="1" spcCol="1270" anchor="ctr" anchorCtr="0">
+          <a:noAutofit/>
+        </a:bodyPr>
+        <a:lstStyle/>
+        <a:p>
+          <a:pPr lvl="0" algn="ctr" defTabSz="1244600">
+            <a:lnSpc>
+              <a:spcPct val="90000"/>
+            </a:lnSpc>
+            <a:spcBef>
+              <a:spcPct val="0"/>
+            </a:spcBef>
+            <a:spcAft>
+              <a:spcPct val="35000"/>
+            </a:spcAft>
+          </a:pPr>
+          <a:r>
+            <a:rPr lang="es-MX" sz="2800" kern="1200" dirty="0" smtClean="0"/>
+            <a:t>Datos</a:t>
+          </a:r>
+          <a:endParaRPr lang="es-MX" sz="2800" kern="1200" dirty="0"/>
+        </a:p>
+      </dsp:txBody>
+      <dsp:txXfrm>
+        <a:off x="955829" y="3032269"/>
+        <a:ext cx="3550225" cy="606454"/>
+      </dsp:txXfrm>
+    </dsp:sp>
   </dsp:spTree>
 </dsp:drawing>
 </file>
@@ -5808,11 +6299,14 @@
           <a:lstStyle/>
           <a:p>
             <a:r>
-              <a:rPr lang="es-MX" dirty="0">
+              <a:rPr lang="es-MX" dirty="0" smtClean="0">
                 <a:latin typeface="Consolas" panose="020B0609020204030204" pitchFamily="49" charset="0"/>
               </a:rPr>
-              <a:t>Introducción a R</a:t>
-            </a:r>
+              <a:t>R Intermedio</a:t>
+            </a:r>
+            <a:endParaRPr lang="es-MX" dirty="0">
+              <a:latin typeface="Consolas" panose="020B0609020204030204" pitchFamily="49" charset="0"/>
+            </a:endParaRPr>
           </a:p>
         </p:txBody>
       </p:sp>
@@ -5841,13 +6335,13 @@
               <a:t>Sesión </a:t>
             </a:r>
             <a:r>
-              <a:rPr lang="es-MX" dirty="0" smtClean="0">
+              <a:rPr lang="es-MX" dirty="0">
                 <a:solidFill>
                   <a:schemeClr val="bg2"/>
                 </a:solidFill>
                 <a:latin typeface="Consolas" panose="020B0609020204030204" pitchFamily="49" charset="0"/>
               </a:rPr>
-              <a:t>3</a:t>
+              <a:t>4</a:t>
             </a:r>
             <a:endParaRPr lang="es-MX" dirty="0">
               <a:solidFill>
@@ -6131,26 +6625,22 @@
           </a:xfrm>
         </p:spPr>
         <p:txBody>
-          <a:bodyPr/>
+          <a:bodyPr>
+            <a:normAutofit fontScale="92500" lnSpcReduction="20000"/>
+          </a:bodyPr>
           <a:lstStyle/>
           <a:p>
+            <a:r>
+              <a:rPr lang="es-MX" dirty="0" smtClean="0">
+                <a:latin typeface="Consolas" panose="020B0609020204030204" pitchFamily="49" charset="0"/>
+              </a:rPr>
+              <a:t>EDA vs </a:t>
+            </a:r>
             <a:r>
               <a:rPr lang="es-MX" dirty="0" err="1" smtClean="0">
                 <a:latin typeface="Consolas" panose="020B0609020204030204" pitchFamily="49" charset="0"/>
               </a:rPr>
-              <a:t>Joins</a:t>
-            </a:r>
-            <a:r>
-              <a:rPr lang="es-MX" dirty="0" smtClean="0">
-                <a:latin typeface="Consolas" panose="020B0609020204030204" pitchFamily="49" charset="0"/>
-              </a:rPr>
-              <a:t> y </a:t>
-            </a:r>
-            <a:r>
-              <a:rPr lang="es-MX" dirty="0" err="1" smtClean="0">
-                <a:latin typeface="Consolas" panose="020B0609020204030204" pitchFamily="49" charset="0"/>
-              </a:rPr>
-              <a:t>pivot</a:t>
+              <a:t>Storytelling</a:t>
             </a:r>
             <a:endParaRPr lang="es-MX" dirty="0">
               <a:latin typeface="Consolas" panose="020B0609020204030204" pitchFamily="49" charset="0"/>
@@ -6165,7 +6655,7 @@
                 </a:solidFill>
                 <a:latin typeface="Consolas" panose="020B0609020204030204" pitchFamily="49" charset="0"/>
               </a:rPr>
-              <a:t>Fundamentos de uniones: </a:t>
+              <a:t>Visualizaciones exploratorias: </a:t>
             </a:r>
             <a:r>
               <a:rPr lang="es-MX" dirty="0" err="1" smtClean="0">
@@ -6174,79 +6664,7 @@
                 </a:solidFill>
                 <a:latin typeface="Consolas" panose="020B0609020204030204" pitchFamily="49" charset="0"/>
               </a:rPr>
-              <a:t>left</a:t>
-            </a:r>
-            <a:r>
-              <a:rPr lang="es-MX" dirty="0" smtClean="0">
-                <a:solidFill>
-                  <a:schemeClr val="accent1"/>
-                </a:solidFill>
-                <a:latin typeface="Consolas" panose="020B0609020204030204" pitchFamily="49" charset="0"/>
-              </a:rPr>
-              <a:t>, </a:t>
-            </a:r>
-            <a:r>
-              <a:rPr lang="es-MX" dirty="0" err="1" smtClean="0">
-                <a:solidFill>
-                  <a:schemeClr val="accent1"/>
-                </a:solidFill>
-                <a:latin typeface="Consolas" panose="020B0609020204030204" pitchFamily="49" charset="0"/>
-              </a:rPr>
-              <a:t>right</a:t>
-            </a:r>
-            <a:r>
-              <a:rPr lang="es-MX" dirty="0" smtClean="0">
-                <a:solidFill>
-                  <a:schemeClr val="accent1"/>
-                </a:solidFill>
-                <a:latin typeface="Consolas" panose="020B0609020204030204" pitchFamily="49" charset="0"/>
-              </a:rPr>
-              <a:t>, anti, </a:t>
-            </a:r>
-            <a:r>
-              <a:rPr lang="es-MX" dirty="0" err="1" smtClean="0">
-                <a:solidFill>
-                  <a:schemeClr val="accent1"/>
-                </a:solidFill>
-                <a:latin typeface="Consolas" panose="020B0609020204030204" pitchFamily="49" charset="0"/>
-              </a:rPr>
-              <a:t>semi</a:t>
-            </a:r>
-            <a:r>
-              <a:rPr lang="es-MX" dirty="0" smtClean="0">
-                <a:solidFill>
-                  <a:schemeClr val="accent1"/>
-                </a:solidFill>
-                <a:latin typeface="Consolas" panose="020B0609020204030204" pitchFamily="49" charset="0"/>
-              </a:rPr>
-              <a:t>. Columnas clave y valores repetidos.</a:t>
-            </a:r>
-            <a:endParaRPr lang="es-MX" dirty="0">
-              <a:solidFill>
-                <a:schemeClr val="accent1"/>
-              </a:solidFill>
-              <a:latin typeface="Consolas" panose="020B0609020204030204" pitchFamily="49" charset="0"/>
-            </a:endParaRPr>
-          </a:p>
-          <a:p>
-            <a:pPr lvl="1"/>
-            <a:r>
-              <a:rPr lang="es-MX" dirty="0" smtClean="0">
-                <a:solidFill>
-                  <a:schemeClr val="accent2"/>
-                </a:solidFill>
-                <a:latin typeface="Consolas" panose="020B0609020204030204" pitchFamily="49" charset="0"/>
-              </a:rPr>
-              <a:t>Pivoteo: </a:t>
-            </a:r>
-            <a:r>
-              <a:rPr lang="es-MX" dirty="0" err="1" smtClean="0">
-                <a:solidFill>
-                  <a:schemeClr val="accent1"/>
-                </a:solidFill>
-                <a:latin typeface="Consolas" panose="020B0609020204030204" pitchFamily="49" charset="0"/>
-              </a:rPr>
-              <a:t>pivot_wider</a:t>
+              <a:t>hist</a:t>
             </a:r>
             <a:r>
               <a:rPr lang="es-MX" dirty="0" smtClean="0">
@@ -6264,7 +6682,7 @@
                 </a:solidFill>
                 <a:latin typeface="Consolas" panose="020B0609020204030204" pitchFamily="49" charset="0"/>
               </a:rPr>
-              <a:t>pivot_longer</a:t>
+              <a:t>boxplot</a:t>
             </a:r>
             <a:r>
               <a:rPr lang="es-MX" dirty="0" smtClean="0">
@@ -6273,7 +6691,43 @@
                 </a:solidFill>
                 <a:latin typeface="Consolas" panose="020B0609020204030204" pitchFamily="49" charset="0"/>
               </a:rPr>
-              <a:t>()</a:t>
+              <a:t>(), </a:t>
+            </a:r>
+            <a:r>
+              <a:rPr lang="es-MX" dirty="0" err="1" smtClean="0">
+                <a:solidFill>
+                  <a:schemeClr val="accent1"/>
+                </a:solidFill>
+                <a:latin typeface="Consolas" panose="020B0609020204030204" pitchFamily="49" charset="0"/>
+              </a:rPr>
+              <a:t>plot</a:t>
+            </a:r>
+            <a:r>
+              <a:rPr lang="es-MX" dirty="0" smtClean="0">
+                <a:solidFill>
+                  <a:schemeClr val="accent1"/>
+                </a:solidFill>
+                <a:latin typeface="Consolas" panose="020B0609020204030204" pitchFamily="49" charset="0"/>
+              </a:rPr>
+              <a:t>()+</a:t>
+            </a:r>
+            <a:r>
+              <a:rPr lang="es-MX" dirty="0" err="1" smtClean="0">
+                <a:solidFill>
+                  <a:schemeClr val="accent1"/>
+                </a:solidFill>
+                <a:latin typeface="Consolas" panose="020B0609020204030204" pitchFamily="49" charset="0"/>
+              </a:rPr>
+              <a:t>abline</a:t>
+            </a:r>
+            <a:r>
+              <a:rPr lang="es-MX" dirty="0" smtClean="0">
+                <a:solidFill>
+                  <a:schemeClr val="accent1"/>
+                </a:solidFill>
+                <a:latin typeface="Consolas" panose="020B0609020204030204" pitchFamily="49" charset="0"/>
+              </a:rPr>
+              <a:t>.</a:t>
             </a:r>
             <a:endParaRPr lang="es-MX" dirty="0">
               <a:solidFill>
@@ -6285,13 +6739,22 @@
           <a:p>
             <a:pPr lvl="1"/>
             <a:r>
+              <a:rPr lang="es-MX" dirty="0" smtClean="0">
+                <a:solidFill>
+                  <a:schemeClr val="accent2"/>
+                </a:solidFill>
+                <a:latin typeface="Consolas" panose="020B0609020204030204" pitchFamily="49" charset="0"/>
+              </a:rPr>
+              <a:t>Visualizaciones </a:t>
+            </a:r>
+            <a:r>
               <a:rPr lang="es-MX" dirty="0" err="1" smtClean="0">
                 <a:solidFill>
                   <a:schemeClr val="accent2"/>
                 </a:solidFill>
                 <a:latin typeface="Consolas" panose="020B0609020204030204" pitchFamily="49" charset="0"/>
               </a:rPr>
-              <a:t>Loops</a:t>
+              <a:t>storytelling</a:t>
             </a:r>
             <a:r>
               <a:rPr lang="es-MX" dirty="0" smtClean="0">
@@ -6300,80 +6763,212 @@
                 </a:solidFill>
                 <a:latin typeface="Consolas" panose="020B0609020204030204" pitchFamily="49" charset="0"/>
               </a:rPr>
-              <a:t> con </a:t>
-            </a:r>
-            <a:r>
-              <a:rPr lang="es-MX" dirty="0" err="1" smtClean="0">
-                <a:solidFill>
-                  <a:schemeClr val="accent2"/>
-                </a:solidFill>
-                <a:latin typeface="Consolas" panose="020B0609020204030204" pitchFamily="49" charset="0"/>
-              </a:rPr>
-              <a:t>for</a:t>
+              <a:t>: </a:t>
             </a:r>
             <a:r>
               <a:rPr lang="es-MX" dirty="0" smtClean="0">
-                <a:solidFill>
-                  <a:schemeClr val="accent2"/>
-                </a:solidFill>
-                <a:latin typeface="Consolas" panose="020B0609020204030204" pitchFamily="49" charset="0"/>
-              </a:rPr>
-              <a:t>()</a:t>
-            </a:r>
-            <a:endParaRPr lang="es-MX" dirty="0">
-              <a:solidFill>
-                <a:schemeClr val="accent2"/>
-              </a:solidFill>
-              <a:latin typeface="Consolas" panose="020B0609020204030204" pitchFamily="49" charset="0"/>
-            </a:endParaRPr>
-          </a:p>
-          <a:p>
-            <a:pPr lvl="1"/>
-            <a:r>
-              <a:rPr lang="es-MX" dirty="0">
-                <a:solidFill>
-                  <a:schemeClr val="accent2"/>
-                </a:solidFill>
-                <a:latin typeface="Consolas" panose="020B0609020204030204" pitchFamily="49" charset="0"/>
-              </a:rPr>
-              <a:t>Agrupaciones: </a:t>
-            </a:r>
-            <a:r>
-              <a:rPr lang="es-MX" dirty="0" err="1">
                 <a:solidFill>
                   <a:schemeClr val="accent1"/>
                 </a:solidFill>
                 <a:latin typeface="Consolas" panose="020B0609020204030204" pitchFamily="49" charset="0"/>
               </a:rPr>
-              <a:t>groupby</a:t>
-            </a:r>
-            <a:r>
-              <a:rPr lang="es-MX" dirty="0">
+              <a:t>Ggplot</a:t>
+            </a:r>
+            <a:r>
+              <a:rPr lang="es-MX" dirty="0" smtClean="0">
                 <a:solidFill>
                   <a:schemeClr val="accent1"/>
                 </a:solidFill>
                 <a:latin typeface="Consolas" panose="020B0609020204030204" pitchFamily="49" charset="0"/>
               </a:rPr>
-              <a:t>() </a:t>
-            </a:r>
-            <a:r>
-              <a:rPr lang="es-MX" dirty="0" err="1">
+              <a:t>2. </a:t>
+            </a:r>
+            <a:r>
+              <a:rPr lang="es-MX" dirty="0" err="1" smtClean="0">
                 <a:solidFill>
                   <a:schemeClr val="accent1"/>
                 </a:solidFill>
                 <a:latin typeface="Consolas" panose="020B0609020204030204" pitchFamily="49" charset="0"/>
               </a:rPr>
-              <a:t>summarize</a:t>
-            </a:r>
-            <a:r>
-              <a:rPr lang="es-MX" dirty="0">
+              <a:t>Grammar</a:t>
+            </a:r>
+            <a:r>
+              <a:rPr lang="es-MX" dirty="0" smtClean="0">
                 <a:solidFill>
                   <a:schemeClr val="accent1"/>
                 </a:solidFill>
                 <a:latin typeface="Consolas" panose="020B0609020204030204" pitchFamily="49" charset="0"/>
               </a:rPr>
+              <a:t> of </a:t>
+            </a:r>
+            <a:r>
+              <a:rPr lang="es-MX" dirty="0" err="1" smtClean="0">
+                <a:solidFill>
+                  <a:schemeClr val="accent1"/>
+                </a:solidFill>
+                <a:latin typeface="Consolas" panose="020B0609020204030204" pitchFamily="49" charset="0"/>
+              </a:rPr>
+              <a:t>graphics</a:t>
+            </a:r>
+            <a:r>
+              <a:rPr lang="es-MX" dirty="0" smtClean="0">
+                <a:solidFill>
+                  <a:schemeClr val="accent1"/>
+                </a:solidFill>
+                <a:latin typeface="Consolas" panose="020B0609020204030204" pitchFamily="49" charset="0"/>
+              </a:rPr>
+              <a:t> y pirámide de capas en </a:t>
+            </a:r>
+            <a:r>
+              <a:rPr lang="es-MX" dirty="0" err="1" smtClean="0">
+                <a:solidFill>
+                  <a:schemeClr val="accent1"/>
+                </a:solidFill>
+                <a:latin typeface="Consolas" panose="020B0609020204030204" pitchFamily="49" charset="0"/>
+              </a:rPr>
+              <a:t>ggplot</a:t>
+            </a:r>
+            <a:r>
+              <a:rPr lang="es-MX" dirty="0" smtClean="0">
+                <a:solidFill>
+                  <a:schemeClr val="accent1"/>
+                </a:solidFill>
+                <a:latin typeface="Consolas" panose="020B0609020204030204" pitchFamily="49" charset="0"/>
+              </a:rPr>
+              <a:t>.</a:t>
+            </a:r>
+            <a:endParaRPr lang="es-MX" dirty="0">
+              <a:solidFill>
+                <a:schemeClr val="accent1"/>
+              </a:solidFill>
+              <a:latin typeface="Consolas" panose="020B0609020204030204" pitchFamily="49" charset="0"/>
+            </a:endParaRPr>
+          </a:p>
+          <a:p>
+            <a:pPr lvl="2"/>
+            <a:r>
+              <a:rPr lang="es-MX" dirty="0" err="1" smtClean="0">
+                <a:latin typeface="Consolas" panose="020B0609020204030204" pitchFamily="49" charset="0"/>
+              </a:rPr>
+              <a:t>Geom_bar</a:t>
+            </a:r>
+            <a:r>
+              <a:rPr lang="es-MX" dirty="0" smtClean="0">
+                <a:latin typeface="Consolas" panose="020B0609020204030204" pitchFamily="49" charset="0"/>
+              </a:rPr>
+              <a:t>(),</a:t>
+            </a:r>
+          </a:p>
+          <a:p>
+            <a:pPr lvl="2"/>
+            <a:r>
+              <a:rPr lang="es-MX" dirty="0" err="1" smtClean="0">
+                <a:latin typeface="Consolas" panose="020B0609020204030204" pitchFamily="49" charset="0"/>
+              </a:rPr>
+              <a:t>Geom_point</a:t>
+            </a:r>
+            <a:r>
+              <a:rPr lang="es-MX" dirty="0" smtClean="0">
+                <a:latin typeface="Consolas" panose="020B0609020204030204" pitchFamily="49" charset="0"/>
+              </a:rPr>
               <a:t>()</a:t>
             </a:r>
+          </a:p>
+          <a:p>
+            <a:pPr lvl="2"/>
+            <a:r>
+              <a:rPr lang="es-MX" dirty="0" err="1" smtClean="0">
+                <a:latin typeface="Consolas" panose="020B0609020204030204" pitchFamily="49" charset="0"/>
+              </a:rPr>
+              <a:t>Theme</a:t>
+            </a:r>
+            <a:r>
+              <a:rPr lang="es-MX" dirty="0" smtClean="0">
+                <a:latin typeface="Consolas" panose="020B0609020204030204" pitchFamily="49" charset="0"/>
+              </a:rPr>
+              <a:t>():</a:t>
+            </a:r>
+          </a:p>
+          <a:p>
+            <a:pPr lvl="3"/>
+            <a:r>
+              <a:rPr lang="es-MX" dirty="0" err="1" smtClean="0">
+                <a:latin typeface="Consolas" panose="020B0609020204030204" pitchFamily="49" charset="0"/>
+              </a:rPr>
+              <a:t>Plot.background</a:t>
+            </a:r>
+            <a:endParaRPr lang="es-MX" dirty="0" smtClean="0">
+              <a:latin typeface="Consolas" panose="020B0609020204030204" pitchFamily="49" charset="0"/>
+            </a:endParaRPr>
+          </a:p>
+          <a:p>
+            <a:pPr lvl="3"/>
+            <a:r>
+              <a:rPr lang="es-MX" dirty="0" err="1" smtClean="0">
+                <a:latin typeface="Consolas" panose="020B0609020204030204" pitchFamily="49" charset="0"/>
+              </a:rPr>
+              <a:t>Panel.background</a:t>
+            </a:r>
+            <a:endParaRPr lang="es-MX" dirty="0" smtClean="0">
+              <a:latin typeface="Consolas" panose="020B0609020204030204" pitchFamily="49" charset="0"/>
+            </a:endParaRPr>
+          </a:p>
+          <a:p>
+            <a:pPr lvl="3"/>
+            <a:r>
+              <a:rPr lang="es-MX" dirty="0" err="1" smtClean="0">
+                <a:latin typeface="Consolas" panose="020B0609020204030204" pitchFamily="49" charset="0"/>
+              </a:rPr>
+              <a:t>Plot.title</a:t>
+            </a:r>
+            <a:endParaRPr lang="es-MX" dirty="0" smtClean="0">
+              <a:latin typeface="Consolas" panose="020B0609020204030204" pitchFamily="49" charset="0"/>
+            </a:endParaRPr>
+          </a:p>
+          <a:p>
+            <a:pPr lvl="3"/>
+            <a:r>
+              <a:rPr lang="es-MX" dirty="0" err="1" smtClean="0">
+                <a:latin typeface="Consolas" panose="020B0609020204030204" pitchFamily="49" charset="0"/>
+              </a:rPr>
+              <a:t>Plot.subtitle</a:t>
+            </a:r>
+            <a:endParaRPr lang="es-MX" dirty="0" smtClean="0">
+              <a:latin typeface="Consolas" panose="020B0609020204030204" pitchFamily="49" charset="0"/>
+            </a:endParaRPr>
+          </a:p>
+          <a:p>
+            <a:pPr lvl="3"/>
+            <a:r>
+              <a:rPr lang="es-MX" dirty="0" err="1" smtClean="0">
+                <a:latin typeface="Consolas" panose="020B0609020204030204" pitchFamily="49" charset="0"/>
+              </a:rPr>
+              <a:t>Axis.title</a:t>
+            </a:r>
+            <a:endParaRPr lang="es-MX" dirty="0" smtClean="0">
+              <a:latin typeface="Consolas" panose="020B0609020204030204" pitchFamily="49" charset="0"/>
+            </a:endParaRPr>
+          </a:p>
+          <a:p>
+            <a:pPr lvl="3"/>
+            <a:r>
+              <a:rPr lang="es-MX" dirty="0" err="1" smtClean="0">
+                <a:latin typeface="Consolas" panose="020B0609020204030204" pitchFamily="49" charset="0"/>
+              </a:rPr>
+              <a:t>Legend.position</a:t>
+            </a:r>
+            <a:endParaRPr lang="es-MX" dirty="0" smtClean="0">
+              <a:latin typeface="Consolas" panose="020B0609020204030204" pitchFamily="49" charset="0"/>
+            </a:endParaRPr>
+          </a:p>
+          <a:p>
+            <a:pPr lvl="2"/>
+            <a:endParaRPr lang="es-MX" dirty="0">
+              <a:solidFill>
+                <a:schemeClr val="accent1"/>
+              </a:solidFill>
+              <a:latin typeface="Consolas" panose="020B0609020204030204" pitchFamily="49" charset="0"/>
+            </a:endParaRPr>
           </a:p>
           <a:p>
             <a:pPr marL="457200" lvl="1" indent="0">
@@ -6395,7 +6990,16 @@
                 </a:solidFill>
                 <a:latin typeface="Consolas" panose="020B0609020204030204" pitchFamily="49" charset="0"/>
               </a:rPr>
-              <a:t>Flujos de datos con múltiples fuentes (accidentes y lluvias)</a:t>
+              <a:t>Primer acercamiento a visualización con </a:t>
+            </a:r>
+            <a:r>
+              <a:rPr lang="es-MX" b="1" dirty="0" err="1" smtClean="0">
+                <a:solidFill>
+                  <a:schemeClr val="accent2"/>
+                </a:solidFill>
+                <a:latin typeface="Consolas" panose="020B0609020204030204" pitchFamily="49" charset="0"/>
+              </a:rPr>
+              <a:t>ggplot</a:t>
             </a:r>
             <a:endParaRPr lang="es-MX" b="1" dirty="0">
               <a:solidFill>
@@ -6889,7 +7493,350 @@
                                         <p:tgtEl>
                                           <p:spTgt spid="3">
                                             <p:txEl>
+                                              <p:pRg st="5" end="5"/>
+                                            </p:txEl>
+                                          </p:spTgt>
+                                        </p:tgtEl>
+                                        <p:attrNameLst>
+                                          <p:attrName>style.visibility</p:attrName>
+                                        </p:attrNameLst>
+                                      </p:cBhvr>
+                                      <p:to>
+                                        <p:strVal val="visible"/>
+                                      </p:to>
+                                    </p:set>
+                                  </p:childTnLst>
+                                </p:cTn>
+                              </p:par>
+                            </p:childTnLst>
+                          </p:cTn>
+                        </p:par>
+                      </p:childTnLst>
+                    </p:cTn>
+                  </p:par>
+                  <p:par>
+                    <p:cTn id="27" fill="hold">
+                      <p:stCondLst>
+                        <p:cond delay="indefinite"/>
+                      </p:stCondLst>
+                      <p:childTnLst>
+                        <p:par>
+                          <p:cTn id="28" fill="hold">
+                            <p:stCondLst>
+                              <p:cond delay="0"/>
+                            </p:stCondLst>
+                            <p:childTnLst>
+                              <p:par>
+                                <p:cTn id="29" presetID="1" presetClass="entr" presetSubtype="0" fill="hold" nodeType="clickEffect">
+                                  <p:stCondLst>
+                                    <p:cond delay="0"/>
+                                  </p:stCondLst>
+                                  <p:childTnLst>
+                                    <p:set>
+                                      <p:cBhvr>
+                                        <p:cTn id="30" dur="1" fill="hold">
+                                          <p:stCondLst>
+                                            <p:cond delay="0"/>
+                                          </p:stCondLst>
+                                        </p:cTn>
+                                        <p:tgtEl>
+                                          <p:spTgt spid="3">
+                                            <p:txEl>
                                               <p:pRg st="6" end="6"/>
+                                            </p:txEl>
+                                          </p:spTgt>
+                                        </p:tgtEl>
+                                        <p:attrNameLst>
+                                          <p:attrName>style.visibility</p:attrName>
+                                        </p:attrNameLst>
+                                      </p:cBhvr>
+                                      <p:to>
+                                        <p:strVal val="visible"/>
+                                      </p:to>
+                                    </p:set>
+                                  </p:childTnLst>
+                                </p:cTn>
+                              </p:par>
+                            </p:childTnLst>
+                          </p:cTn>
+                        </p:par>
+                      </p:childTnLst>
+                    </p:cTn>
+                  </p:par>
+                  <p:par>
+                    <p:cTn id="31" fill="hold">
+                      <p:stCondLst>
+                        <p:cond delay="indefinite"/>
+                      </p:stCondLst>
+                      <p:childTnLst>
+                        <p:par>
+                          <p:cTn id="32" fill="hold">
+                            <p:stCondLst>
+                              <p:cond delay="0"/>
+                            </p:stCondLst>
+                            <p:childTnLst>
+                              <p:par>
+                                <p:cTn id="33" presetID="1" presetClass="entr" presetSubtype="0" fill="hold" nodeType="clickEffect">
+                                  <p:stCondLst>
+                                    <p:cond delay="0"/>
+                                  </p:stCondLst>
+                                  <p:childTnLst>
+                                    <p:set>
+                                      <p:cBhvr>
+                                        <p:cTn id="34" dur="1" fill="hold">
+                                          <p:stCondLst>
+                                            <p:cond delay="0"/>
+                                          </p:stCondLst>
+                                        </p:cTn>
+                                        <p:tgtEl>
+                                          <p:spTgt spid="3">
+                                            <p:txEl>
+                                              <p:pRg st="7" end="7"/>
+                                            </p:txEl>
+                                          </p:spTgt>
+                                        </p:tgtEl>
+                                        <p:attrNameLst>
+                                          <p:attrName>style.visibility</p:attrName>
+                                        </p:attrNameLst>
+                                      </p:cBhvr>
+                                      <p:to>
+                                        <p:strVal val="visible"/>
+                                      </p:to>
+                                    </p:set>
+                                  </p:childTnLst>
+                                </p:cTn>
+                              </p:par>
+                            </p:childTnLst>
+                          </p:cTn>
+                        </p:par>
+                      </p:childTnLst>
+                    </p:cTn>
+                  </p:par>
+                  <p:par>
+                    <p:cTn id="35" fill="hold">
+                      <p:stCondLst>
+                        <p:cond delay="indefinite"/>
+                      </p:stCondLst>
+                      <p:childTnLst>
+                        <p:par>
+                          <p:cTn id="36" fill="hold">
+                            <p:stCondLst>
+                              <p:cond delay="0"/>
+                            </p:stCondLst>
+                            <p:childTnLst>
+                              <p:par>
+                                <p:cTn id="37" presetID="1" presetClass="entr" presetSubtype="0" fill="hold" nodeType="clickEffect">
+                                  <p:stCondLst>
+                                    <p:cond delay="0"/>
+                                  </p:stCondLst>
+                                  <p:childTnLst>
+                                    <p:set>
+                                      <p:cBhvr>
+                                        <p:cTn id="38" dur="1" fill="hold">
+                                          <p:stCondLst>
+                                            <p:cond delay="0"/>
+                                          </p:stCondLst>
+                                        </p:cTn>
+                                        <p:tgtEl>
+                                          <p:spTgt spid="3">
+                                            <p:txEl>
+                                              <p:pRg st="8" end="8"/>
+                                            </p:txEl>
+                                          </p:spTgt>
+                                        </p:tgtEl>
+                                        <p:attrNameLst>
+                                          <p:attrName>style.visibility</p:attrName>
+                                        </p:attrNameLst>
+                                      </p:cBhvr>
+                                      <p:to>
+                                        <p:strVal val="visible"/>
+                                      </p:to>
+                                    </p:set>
+                                  </p:childTnLst>
+                                </p:cTn>
+                              </p:par>
+                            </p:childTnLst>
+                          </p:cTn>
+                        </p:par>
+                      </p:childTnLst>
+                    </p:cTn>
+                  </p:par>
+                  <p:par>
+                    <p:cTn id="39" fill="hold">
+                      <p:stCondLst>
+                        <p:cond delay="indefinite"/>
+                      </p:stCondLst>
+                      <p:childTnLst>
+                        <p:par>
+                          <p:cTn id="40" fill="hold">
+                            <p:stCondLst>
+                              <p:cond delay="0"/>
+                            </p:stCondLst>
+                            <p:childTnLst>
+                              <p:par>
+                                <p:cTn id="41" presetID="1" presetClass="entr" presetSubtype="0" fill="hold" nodeType="clickEffect">
+                                  <p:stCondLst>
+                                    <p:cond delay="0"/>
+                                  </p:stCondLst>
+                                  <p:childTnLst>
+                                    <p:set>
+                                      <p:cBhvr>
+                                        <p:cTn id="42" dur="1" fill="hold">
+                                          <p:stCondLst>
+                                            <p:cond delay="0"/>
+                                          </p:stCondLst>
+                                        </p:cTn>
+                                        <p:tgtEl>
+                                          <p:spTgt spid="3">
+                                            <p:txEl>
+                                              <p:pRg st="9" end="9"/>
+                                            </p:txEl>
+                                          </p:spTgt>
+                                        </p:tgtEl>
+                                        <p:attrNameLst>
+                                          <p:attrName>style.visibility</p:attrName>
+                                        </p:attrNameLst>
+                                      </p:cBhvr>
+                                      <p:to>
+                                        <p:strVal val="visible"/>
+                                      </p:to>
+                                    </p:set>
+                                  </p:childTnLst>
+                                </p:cTn>
+                              </p:par>
+                            </p:childTnLst>
+                          </p:cTn>
+                        </p:par>
+                      </p:childTnLst>
+                    </p:cTn>
+                  </p:par>
+                  <p:par>
+                    <p:cTn id="43" fill="hold">
+                      <p:stCondLst>
+                        <p:cond delay="indefinite"/>
+                      </p:stCondLst>
+                      <p:childTnLst>
+                        <p:par>
+                          <p:cTn id="44" fill="hold">
+                            <p:stCondLst>
+                              <p:cond delay="0"/>
+                            </p:stCondLst>
+                            <p:childTnLst>
+                              <p:par>
+                                <p:cTn id="45" presetID="1" presetClass="entr" presetSubtype="0" fill="hold" nodeType="clickEffect">
+                                  <p:stCondLst>
+                                    <p:cond delay="0"/>
+                                  </p:stCondLst>
+                                  <p:childTnLst>
+                                    <p:set>
+                                      <p:cBhvr>
+                                        <p:cTn id="46" dur="1" fill="hold">
+                                          <p:stCondLst>
+                                            <p:cond delay="0"/>
+                                          </p:stCondLst>
+                                        </p:cTn>
+                                        <p:tgtEl>
+                                          <p:spTgt spid="3">
+                                            <p:txEl>
+                                              <p:pRg st="10" end="10"/>
+                                            </p:txEl>
+                                          </p:spTgt>
+                                        </p:tgtEl>
+                                        <p:attrNameLst>
+                                          <p:attrName>style.visibility</p:attrName>
+                                        </p:attrNameLst>
+                                      </p:cBhvr>
+                                      <p:to>
+                                        <p:strVal val="visible"/>
+                                      </p:to>
+                                    </p:set>
+                                  </p:childTnLst>
+                                </p:cTn>
+                              </p:par>
+                            </p:childTnLst>
+                          </p:cTn>
+                        </p:par>
+                      </p:childTnLst>
+                    </p:cTn>
+                  </p:par>
+                  <p:par>
+                    <p:cTn id="47" fill="hold">
+                      <p:stCondLst>
+                        <p:cond delay="indefinite"/>
+                      </p:stCondLst>
+                      <p:childTnLst>
+                        <p:par>
+                          <p:cTn id="48" fill="hold">
+                            <p:stCondLst>
+                              <p:cond delay="0"/>
+                            </p:stCondLst>
+                            <p:childTnLst>
+                              <p:par>
+                                <p:cTn id="49" presetID="1" presetClass="entr" presetSubtype="0" fill="hold" nodeType="clickEffect">
+                                  <p:stCondLst>
+                                    <p:cond delay="0"/>
+                                  </p:stCondLst>
+                                  <p:childTnLst>
+                                    <p:set>
+                                      <p:cBhvr>
+                                        <p:cTn id="50" dur="1" fill="hold">
+                                          <p:stCondLst>
+                                            <p:cond delay="0"/>
+                                          </p:stCondLst>
+                                        </p:cTn>
+                                        <p:tgtEl>
+                                          <p:spTgt spid="3">
+                                            <p:txEl>
+                                              <p:pRg st="11" end="11"/>
+                                            </p:txEl>
+                                          </p:spTgt>
+                                        </p:tgtEl>
+                                        <p:attrNameLst>
+                                          <p:attrName>style.visibility</p:attrName>
+                                        </p:attrNameLst>
+                                      </p:cBhvr>
+                                      <p:to>
+                                        <p:strVal val="visible"/>
+                                      </p:to>
+                                    </p:set>
+                                  </p:childTnLst>
+                                </p:cTn>
+                              </p:par>
+                            </p:childTnLst>
+                          </p:cTn>
+                        </p:par>
+                      </p:childTnLst>
+                    </p:cTn>
+                  </p:par>
+                  <p:par>
+                    <p:cTn id="51" fill="hold">
+                      <p:stCondLst>
+                        <p:cond delay="indefinite"/>
+                      </p:stCondLst>
+                      <p:childTnLst>
+                        <p:par>
+                          <p:cTn id="52" fill="hold">
+                            <p:stCondLst>
+                              <p:cond delay="0"/>
+                            </p:stCondLst>
+                            <p:childTnLst>
+                              <p:par>
+                                <p:cTn id="53" presetID="1" presetClass="entr" presetSubtype="0" fill="hold" nodeType="clickEffect">
+                                  <p:stCondLst>
+                                    <p:cond delay="0"/>
+                                  </p:stCondLst>
+                                  <p:childTnLst>
+                                    <p:set>
+                                      <p:cBhvr>
+                                        <p:cTn id="54" dur="1" fill="hold">
+                                          <p:stCondLst>
+                                            <p:cond delay="0"/>
+                                          </p:stCondLst>
+                                        </p:cTn>
+                                        <p:tgtEl>
+                                          <p:spTgt spid="3">
+                                            <p:txEl>
+                                              <p:pRg st="14" end="14"/>
                                             </p:txEl>
                                           </p:spTgt>
                                         </p:tgtEl>
@@ -6996,7 +7943,7 @@
         </p:nvSpPr>
         <p:spPr>
           <a:xfrm>
-            <a:off x="838200" y="1514475"/>
+            <a:off x="591065" y="2324030"/>
             <a:ext cx="10229850" cy="5172075"/>
           </a:xfrm>
         </p:spPr>
@@ -7011,13 +7958,31 @@
               <a:buAutoNum type="arabicPeriod"/>
             </a:pPr>
             <a:r>
+              <a:rPr lang="es-MX" sz="2000" b="1" dirty="0" err="1" smtClean="0">
+                <a:solidFill>
+                  <a:schemeClr val="accent2"/>
+                </a:solidFill>
+                <a:latin typeface="Consolas" panose="020B0609020204030204" pitchFamily="49" charset="0"/>
+              </a:rPr>
+              <a:t>Recap</a:t>
+            </a:r>
+            <a:r>
               <a:rPr lang="es-MX" sz="2000" b="1" dirty="0" smtClean="0">
                 <a:solidFill>
                   <a:schemeClr val="accent2"/>
                 </a:solidFill>
                 <a:latin typeface="Consolas" panose="020B0609020204030204" pitchFamily="49" charset="0"/>
               </a:rPr>
-              <a:t>Visualización de datos</a:t>
+              <a:t> y </a:t>
+            </a:r>
+            <a:r>
+              <a:rPr lang="es-MX" sz="2000" b="1" dirty="0" err="1" smtClean="0">
+                <a:solidFill>
+                  <a:schemeClr val="accent2"/>
+                </a:solidFill>
+                <a:latin typeface="Consolas" panose="020B0609020204030204" pitchFamily="49" charset="0"/>
+              </a:rPr>
+              <a:t>ggplot</a:t>
             </a:r>
             <a:endParaRPr lang="es-MX" sz="2000" b="1" dirty="0">
               <a:solidFill>
@@ -7032,22 +7997,94 @@
               <a:rPr lang="es-MX" sz="1800" dirty="0" smtClean="0">
                 <a:latin typeface="Consolas" panose="020B0609020204030204" pitchFamily="49" charset="0"/>
               </a:rPr>
-              <a:t>Funciones base</a:t>
-            </a:r>
-          </a:p>
-          <a:p>
-            <a:pPr lvl="1"/>
+              <a:t>Funciones </a:t>
+            </a:r>
             <a:r>
               <a:rPr lang="es-MX" sz="1800" dirty="0" err="1" smtClean="0">
                 <a:latin typeface="Consolas" panose="020B0609020204030204" pitchFamily="49" charset="0"/>
               </a:rPr>
-              <a:t>Ggplot</a:t>
+              <a:t>dplyr</a:t>
+            </a:r>
+            <a:endParaRPr lang="es-MX" sz="1800" dirty="0" smtClean="0">
+              <a:latin typeface="Consolas" panose="020B0609020204030204" pitchFamily="49" charset="0"/>
+            </a:endParaRPr>
+          </a:p>
+          <a:p>
+            <a:pPr lvl="1"/>
+            <a:r>
+              <a:rPr lang="es-MX" sz="1800" dirty="0" err="1" smtClean="0">
+                <a:latin typeface="Consolas" panose="020B0609020204030204" pitchFamily="49" charset="0"/>
+              </a:rPr>
+              <a:t>Mutate</a:t>
             </a:r>
             <a:r>
               <a:rPr lang="es-MX" sz="1800" dirty="0" smtClean="0">
                 <a:latin typeface="Consolas" panose="020B0609020204030204" pitchFamily="49" charset="0"/>
               </a:rPr>
-              <a:t>()</a:t>
+              <a:t> + </a:t>
+            </a:r>
+            <a:r>
+              <a:rPr lang="es-MX" sz="1800" dirty="0" err="1" smtClean="0">
+                <a:latin typeface="Consolas" panose="020B0609020204030204" pitchFamily="49" charset="0"/>
+              </a:rPr>
+              <a:t>lag</a:t>
+            </a:r>
+            <a:endParaRPr lang="es-MX" sz="1800" dirty="0" smtClean="0">
+              <a:latin typeface="Consolas" panose="020B0609020204030204" pitchFamily="49" charset="0"/>
+            </a:endParaRPr>
+          </a:p>
+          <a:p>
+            <a:pPr lvl="1"/>
+            <a:r>
+              <a:rPr lang="es-MX" sz="1800" dirty="0" smtClean="0">
+                <a:latin typeface="Consolas" panose="020B0609020204030204" pitchFamily="49" charset="0"/>
+              </a:rPr>
+              <a:t>Visualización con </a:t>
+            </a:r>
+            <a:r>
+              <a:rPr lang="es-MX" sz="1800" dirty="0" err="1" smtClean="0">
+                <a:latin typeface="Consolas" panose="020B0609020204030204" pitchFamily="49" charset="0"/>
+              </a:rPr>
+              <a:t>ggplot</a:t>
+            </a:r>
+            <a:endParaRPr lang="es-MX" sz="1800" dirty="0" smtClean="0">
+              <a:latin typeface="Consolas" panose="020B0609020204030204" pitchFamily="49" charset="0"/>
+            </a:endParaRPr>
+          </a:p>
+          <a:p>
+            <a:pPr lvl="1"/>
+            <a:r>
+              <a:rPr lang="es-MX" sz="1800" dirty="0" smtClean="0">
+                <a:latin typeface="Consolas" panose="020B0609020204030204" pitchFamily="49" charset="0"/>
+              </a:rPr>
+              <a:t>Elaboración de un tema propio</a:t>
+            </a:r>
+          </a:p>
+          <a:p>
+            <a:pPr lvl="1"/>
+            <a:r>
+              <a:rPr lang="es-MX" sz="1800" dirty="0" err="1" smtClean="0">
+                <a:latin typeface="Consolas" panose="020B0609020204030204" pitchFamily="49" charset="0"/>
+              </a:rPr>
+              <a:t>Geom_text</a:t>
+            </a:r>
+            <a:endParaRPr lang="es-MX" sz="1800" dirty="0" smtClean="0">
+              <a:latin typeface="Consolas" panose="020B0609020204030204" pitchFamily="49" charset="0"/>
+            </a:endParaRPr>
+          </a:p>
+          <a:p>
+            <a:pPr lvl="1"/>
+            <a:r>
+              <a:rPr lang="es-MX" sz="1800" dirty="0" err="1" smtClean="0">
+                <a:latin typeface="Consolas" panose="020B0609020204030204" pitchFamily="49" charset="0"/>
+              </a:rPr>
+              <a:t>Fill</a:t>
+            </a:r>
+            <a:r>
+              <a:rPr lang="es-MX" sz="1800" dirty="0" smtClean="0">
+                <a:latin typeface="Consolas" panose="020B0609020204030204" pitchFamily="49" charset="0"/>
+              </a:rPr>
+              <a:t> condicional</a:t>
             </a:r>
             <a:endParaRPr lang="es-MX" sz="1800" dirty="0">
               <a:latin typeface="Consolas" panose="020B0609020204030204" pitchFamily="49" charset="0"/>
@@ -7058,153 +8095,6 @@
             <a:endParaRPr lang="es-MX" sz="1800" dirty="0">
               <a:latin typeface="Consolas" panose="020B0609020204030204" pitchFamily="49" charset="0"/>
             </a:endParaRPr>
-          </a:p>
-          <a:p>
-            <a:pPr marL="514350" indent="-514350">
-              <a:buFont typeface="+mj-lt"/>
-              <a:buAutoNum type="arabicPeriod"/>
-            </a:pPr>
-            <a:r>
-              <a:rPr lang="es-MX" sz="2000" b="1" i="1" dirty="0" smtClean="0">
-                <a:solidFill>
-                  <a:schemeClr val="accent2"/>
-                </a:solidFill>
-                <a:latin typeface="Consolas" panose="020B0609020204030204" pitchFamily="49" charset="0"/>
-              </a:rPr>
-              <a:t>EDA</a:t>
-            </a:r>
-            <a:endParaRPr lang="es-MX" sz="2000" b="1" i="1" dirty="0">
-              <a:solidFill>
-                <a:schemeClr val="accent2"/>
-              </a:solidFill>
-              <a:latin typeface="Consolas" panose="020B0609020204030204" pitchFamily="49" charset="0"/>
-            </a:endParaRPr>
-          </a:p>
-          <a:p>
-            <a:pPr lvl="1"/>
-            <a:r>
-              <a:rPr lang="es-MX" sz="1800" dirty="0" smtClean="0">
-                <a:latin typeface="Consolas" panose="020B0609020204030204" pitchFamily="49" charset="0"/>
-              </a:rPr>
-              <a:t>Histogramas</a:t>
-            </a:r>
-          </a:p>
-          <a:p>
-            <a:pPr lvl="1"/>
-            <a:r>
-              <a:rPr lang="es-MX" sz="1800" dirty="0" err="1" smtClean="0">
-                <a:latin typeface="Consolas" panose="020B0609020204030204" pitchFamily="49" charset="0"/>
-              </a:rPr>
-              <a:t>Scatterplots</a:t>
-            </a:r>
-            <a:endParaRPr lang="es-MX" sz="1800" dirty="0" smtClean="0">
-              <a:latin typeface="Consolas" panose="020B0609020204030204" pitchFamily="49" charset="0"/>
-            </a:endParaRPr>
-          </a:p>
-          <a:p>
-            <a:pPr lvl="1"/>
-            <a:r>
-              <a:rPr lang="es-MX" sz="1800" dirty="0" err="1" smtClean="0">
-                <a:latin typeface="Consolas" panose="020B0609020204030204" pitchFamily="49" charset="0"/>
-              </a:rPr>
-              <a:t>Boxplots</a:t>
-            </a:r>
-            <a:endParaRPr lang="es-MX" sz="1800" dirty="0">
-              <a:latin typeface="Consolas" panose="020B0609020204030204" pitchFamily="49" charset="0"/>
-            </a:endParaRPr>
-          </a:p>
-          <a:p>
-            <a:pPr lvl="1"/>
-            <a:endParaRPr lang="es-MX" sz="1800" dirty="0">
-              <a:latin typeface="Consolas" panose="020B0609020204030204" pitchFamily="49" charset="0"/>
-            </a:endParaRPr>
-          </a:p>
-          <a:p>
-            <a:pPr marL="514350" indent="-514350">
-              <a:buFont typeface="+mj-lt"/>
-              <a:buAutoNum type="arabicPeriod"/>
-            </a:pPr>
-            <a:r>
-              <a:rPr lang="es-MX" sz="2000" b="1" dirty="0" smtClean="0">
-                <a:solidFill>
-                  <a:schemeClr val="accent2"/>
-                </a:solidFill>
-                <a:latin typeface="Consolas" panose="020B0609020204030204" pitchFamily="49" charset="0"/>
-              </a:rPr>
-              <a:t>Presentación</a:t>
-            </a:r>
-            <a:endParaRPr lang="es-MX" sz="2000" b="1" dirty="0">
-              <a:solidFill>
-                <a:schemeClr val="accent2"/>
-              </a:solidFill>
-              <a:latin typeface="Consolas" panose="020B0609020204030204" pitchFamily="49" charset="0"/>
-            </a:endParaRPr>
-          </a:p>
-          <a:p>
-            <a:pPr lvl="1"/>
-            <a:r>
-              <a:rPr lang="es-MX" sz="1800" dirty="0" err="1" smtClean="0">
-                <a:latin typeface="Consolas" panose="020B0609020204030204" pitchFamily="49" charset="0"/>
-              </a:rPr>
-              <a:t>Ggplot</a:t>
-            </a:r>
-            <a:r>
-              <a:rPr lang="es-MX" sz="1800" dirty="0" smtClean="0">
-                <a:latin typeface="Consolas" panose="020B0609020204030204" pitchFamily="49" charset="0"/>
-              </a:rPr>
-              <a:t>()</a:t>
-            </a:r>
-          </a:p>
-          <a:p>
-            <a:pPr lvl="1"/>
-            <a:r>
-              <a:rPr lang="es-MX" sz="1800" dirty="0" smtClean="0">
-                <a:latin typeface="Consolas" panose="020B0609020204030204" pitchFamily="49" charset="0"/>
-              </a:rPr>
-              <a:t>Gramática de visualización</a:t>
-            </a:r>
-          </a:p>
-          <a:p>
-            <a:pPr lvl="1"/>
-            <a:r>
-              <a:rPr lang="es-MX" sz="1800" dirty="0" smtClean="0">
-                <a:latin typeface="Consolas" panose="020B0609020204030204" pitchFamily="49" charset="0"/>
-              </a:rPr>
-              <a:t>Capas y componentes</a:t>
-            </a:r>
-            <a:endParaRPr lang="es-MX" sz="1800" dirty="0">
-              <a:latin typeface="Consolas" panose="020B0609020204030204" pitchFamily="49" charset="0"/>
-            </a:endParaRPr>
-          </a:p>
-          <a:p>
-            <a:pPr lvl="1"/>
-            <a:r>
-              <a:rPr lang="es-MX" sz="1800" dirty="0" smtClean="0">
-                <a:latin typeface="Consolas" panose="020B0609020204030204" pitchFamily="49" charset="0"/>
-              </a:rPr>
-              <a:t>Temas y funciones adicionales</a:t>
-            </a:r>
-            <a:endParaRPr lang="es-MX" sz="1800" dirty="0">
-              <a:latin typeface="Consolas" panose="020B0609020204030204" pitchFamily="49" charset="0"/>
-            </a:endParaRPr>
-          </a:p>
-          <a:p>
-            <a:pPr marL="514350" indent="-514350">
-              <a:buFont typeface="+mj-lt"/>
-              <a:buAutoNum type="arabicPeriod"/>
-            </a:pPr>
-            <a:endParaRPr lang="es-MX" sz="1600" dirty="0">
-              <a:solidFill>
-                <a:schemeClr val="accent2"/>
-              </a:solidFill>
-            </a:endParaRPr>
-          </a:p>
-          <a:p>
-            <a:pPr marL="514350" indent="-514350">
-              <a:buFont typeface="+mj-lt"/>
-              <a:buAutoNum type="arabicPeriod"/>
-            </a:pPr>
-            <a:endParaRPr lang="es-MX" dirty="0"/>
           </a:p>
         </p:txBody>
       </p:sp>
@@ -7245,8 +8135,8 @@
         </p:nvSpPr>
         <p:spPr>
           <a:xfrm>
-            <a:off x="6443090" y="1927205"/>
-            <a:ext cx="3848100" cy="2031325"/>
+            <a:off x="6377188" y="1379261"/>
+            <a:ext cx="3848100" cy="1754326"/>
           </a:xfrm>
           <a:prstGeom prst="rect">
             <a:avLst/>
@@ -7266,7 +8156,7 @@
                 </a:solidFill>
                 <a:latin typeface="Consolas" panose="020B0609020204030204" pitchFamily="49" charset="0"/>
               </a:rPr>
-              <a:t>Al final de la sesión, </a:t>
+              <a:t>Al final de la </a:t>
             </a:r>
             <a:r>
               <a:rPr lang="es-MX" dirty="0" smtClean="0">
@@ -7275,11 +8165,59 @@
                 </a:solidFill>
                 <a:latin typeface="Consolas" panose="020B0609020204030204" pitchFamily="49" charset="0"/>
               </a:rPr>
-              <a:t>tendrás disponible un catálogo de funciones de visualización exploratoria y los fundamentos para comenzar a construir visualizaciones de impacto</a:t>
-            </a:r>
+              <a:t>sesión</a:t>
+            </a:r>
+            <a:r>
+              <a:rPr lang="es-MX" dirty="0">
+                <a:solidFill>
+                  <a:schemeClr val="accent1"/>
+                </a:solidFill>
+                <a:latin typeface="Consolas" panose="020B0609020204030204" pitchFamily="49" charset="0"/>
+              </a:rPr>
+              <a:t> </a:t>
+            </a:r>
+            <a:r>
+              <a:rPr lang="es-MX" dirty="0" smtClean="0">
+                <a:solidFill>
+                  <a:schemeClr val="accent1"/>
+                </a:solidFill>
+                <a:latin typeface="Consolas" panose="020B0609020204030204" pitchFamily="49" charset="0"/>
+              </a:rPr>
+              <a:t>podrás generar  tu propio tema y tendrás herramientas para llevar una visualización sencilla a un grado de presentación</a:t>
+            </a:r>
+            <a:endParaRPr lang="es-MX" dirty="0" smtClean="0">
+              <a:solidFill>
+                <a:schemeClr val="accent1"/>
+              </a:solidFill>
+              <a:latin typeface="Consolas" panose="020B0609020204030204" pitchFamily="49" charset="0"/>
+            </a:endParaRPr>
           </a:p>
         </p:txBody>
       </p:sp>
+      <p:pic>
+        <p:nvPicPr>
+          <p:cNvPr id="6" name="Imagen 5"/>
+          <p:cNvPicPr>
+            <a:picLocks noChangeAspect="1"/>
+          </p:cNvPicPr>
+          <p:nvPr/>
+        </p:nvPicPr>
+        <p:blipFill>
+          <a:blip r:embed="rId3"/>
+          <a:stretch>
+            <a:fillRect/>
+          </a:stretch>
+        </p:blipFill>
+        <p:spPr>
+          <a:xfrm>
+            <a:off x="6037901" y="3394117"/>
+            <a:ext cx="4526674" cy="3031903"/>
+          </a:xfrm>
+          <a:prstGeom prst="rect">
+            <a:avLst/>
+          </a:prstGeom>
+        </p:spPr>
+      </p:pic>
     </p:spTree>
     <p:extLst>
       <p:ext uri="{BB962C8B-B14F-4D97-AF65-F5344CB8AC3E}">
@@ -7326,7 +8264,7 @@
                                         <p:tgtEl>
                                           <p:spTgt spid="3">
                                             <p:txEl>
-                                              <p:pRg st="0" end="0"/>
+                                              <p:pRg st="1" end="1"/>
                                             </p:txEl>
                                           </p:spTgt>
                                         </p:tgtEl>
@@ -7375,7 +8313,7 @@
                                         <p:tgtEl>
                                           <p:spTgt spid="3">
                                             <p:txEl>
-                                              <p:pRg st="1" end="1"/>
+                                              <p:pRg st="2" end="2"/>
                                             </p:txEl>
                                           </p:spTgt>
                                         </p:tgtEl>
@@ -7424,7 +8362,7 @@
                                         <p:tgtEl>
                                           <p:spTgt spid="3">
                                             <p:txEl>
-                                              <p:pRg st="2" end="2"/>
+                                              <p:pRg st="0" end="0"/>
                                             </p:txEl>
                                           </p:spTgt>
                                         </p:tgtEl>
@@ -7473,7 +8411,7 @@
                                         <p:tgtEl>
                                           <p:spTgt spid="3">
                                             <p:txEl>
-                                              <p:pRg st="4" end="4"/>
+                                              <p:pRg st="3" end="3"/>
                                             </p:txEl>
                                           </p:spTgt>
                                         </p:tgtEl>
@@ -7522,7 +8460,7 @@
                                         <p:tgtEl>
                                           <p:spTgt spid="3">
                                             <p:txEl>
-                                              <p:pRg st="5" end="5"/>
+                                              <p:pRg st="4" end="4"/>
                                             </p:txEl>
                                           </p:spTgt>
                                         </p:tgtEl>
@@ -7571,7 +8509,7 @@
                                         <p:tgtEl>
                                           <p:spTgt spid="3">
                                             <p:txEl>
-                                              <p:pRg st="6" end="6"/>
+                                              <p:pRg st="5" end="5"/>
                                             </p:txEl>
                                           </p:spTgt>
                                         </p:tgtEl>
@@ -7620,7 +8558,7 @@
                                         <p:tgtEl>
                                           <p:spTgt spid="3">
                                             <p:txEl>
-                                              <p:pRg st="7" end="7"/>
+                                              <p:pRg st="6" end="6"/>
                                             </p:txEl>
                                           </p:spTgt>
                                         </p:tgtEl>
@@ -7662,55 +8600,6 @@
                                     <p:set>
                                       <p:cBhvr>
                                         <p:cTn id="34" dur="1" fill="hold">
-                                          <p:stCondLst>
-                                            <p:cond delay="0"/>
-                                          </p:stCondLst>
-                                        </p:cTn>
-                                        <p:tgtEl>
-                                          <p:spTgt spid="3">
-                                            <p:txEl>
-                                              <p:pRg st="9" end="9"/>
-                                            </p:txEl>
-                                          </p:spTgt>
-                                        </p:tgtEl>
-                                        <p:attrNameLst>
-                                          <p:attrName>style.visibility</p:attrName>
-                                        </p:attrNameLst>
-                                      </p:cBhvr>
-                                      <p:to>
-                                        <p:strVal val="visible"/>
-                                      </p:to>
-                                    </p:set>
-                                  </p:childTnLst>
-                                </p:cTn>
-                              </p:par>
-                            </p:childTnLst>
-                          </p:cTn>
-                        </p:par>
-                      </p:childTnLst>
-                    </p:cTn>
-                  </p:par>
-                  <p:par>
-                    <p:cTn id="35" fill="hold">
-                      <p:stCondLst>
-                        <p:cond delay="indefinite"/>
-                      </p:stCondLst>
-                      <p:childTnLst>
-                        <p:par>
-                          <p:cTn id="36" fill="hold">
-                            <p:stCondLst>
-                              <p:cond delay="0"/>
-                            </p:stCondLst>
-                            <p:childTnLst>
-                              <p:par>
-                                <p:cTn id="37" presetID="1" presetClass="entr" presetSubtype="0" fill="hold" nodeType="clickEffect">
-                                  <p:stCondLst>
-                                    <p:cond delay="0"/>
-                                  </p:stCondLst>
-                                  <p:childTnLst>
-                                    <p:set>
-                                      <p:cBhvr>
-                                        <p:cTn id="38" dur="1" fill="hold">
                                           <p:stCondLst>
                                             <p:cond delay="0"/>
                                           </p:stCondLst>
@@ -7765,124 +8654,6 @@
 </file>
 
 <file path=ppt/slides/slide4.xml><?xml version="1.0" encoding="utf-8"?>
-<p:sld xmlns:a="http://schemas.openxmlformats.org/drawingml/2006/main" xmlns:r="http://schemas.openxmlformats.org/officeDocument/2006/relationships" xmlns:p="http://schemas.openxmlformats.org/presentationml/2006/main">
-  <p:cSld>
-    <p:spTree>
-      <p:nvGrpSpPr>
-        <p:cNvPr id="1" name=""/>
-        <p:cNvGrpSpPr/>
-        <p:nvPr/>
-      </p:nvGrpSpPr>
-      <p:grpSpPr>
-        <a:xfrm>
-          <a:off x="0" y="0"/>
-          <a:ext cx="0" cy="0"/>
-          <a:chOff x="0" y="0"/>
-          <a:chExt cx="0" cy="0"/>
-        </a:xfrm>
-      </p:grpSpPr>
-      <p:sp>
-        <p:nvSpPr>
-          <p:cNvPr id="2" name="Título 1"/>
-          <p:cNvSpPr>
-            <a:spLocks noGrp="1"/>
-          </p:cNvSpPr>
-          <p:nvPr>
-            <p:ph type="title"/>
-          </p:nvPr>
-        </p:nvSpPr>
-        <p:spPr/>
-        <p:txBody>
-          <a:bodyPr/>
-          <a:lstStyle/>
-          <a:p>
-            <a:r>
-              <a:rPr lang="es-MX" dirty="0" smtClean="0">
-                <a:latin typeface="Consolas" panose="020B0609020204030204" pitchFamily="49" charset="0"/>
-              </a:rPr>
-              <a:t>EDA vs. </a:t>
-            </a:r>
-            <a:r>
-              <a:rPr lang="es-MX" i="1" dirty="0" err="1" smtClean="0">
-                <a:latin typeface="Consolas" panose="020B0609020204030204" pitchFamily="49" charset="0"/>
-              </a:rPr>
-              <a:t>Storytelling</a:t>
-            </a:r>
-            <a:endParaRPr lang="es-MX" i="1" dirty="0">
-              <a:latin typeface="Consolas" panose="020B0609020204030204" pitchFamily="49" charset="0"/>
-            </a:endParaRPr>
-          </a:p>
-        </p:txBody>
-      </p:sp>
-      <p:pic>
-        <p:nvPicPr>
-          <p:cNvPr id="3" name="Imagen 2"/>
-          <p:cNvPicPr>
-            <a:picLocks noChangeAspect="1"/>
-          </p:cNvPicPr>
-          <p:nvPr/>
-        </p:nvPicPr>
-        <p:blipFill>
-          <a:blip r:embed="rId2"/>
-          <a:stretch>
-            <a:fillRect/>
-          </a:stretch>
-        </p:blipFill>
-        <p:spPr>
-          <a:xfrm>
-            <a:off x="742386" y="2316763"/>
-            <a:ext cx="4513355" cy="2871511"/>
-          </a:xfrm>
-          <a:prstGeom prst="rect">
-            <a:avLst/>
-          </a:prstGeom>
-        </p:spPr>
-      </p:pic>
-      <p:pic>
-        <p:nvPicPr>
-          <p:cNvPr id="4" name="Imagen 3"/>
-          <p:cNvPicPr>
-            <a:picLocks noChangeAspect="1"/>
-          </p:cNvPicPr>
-          <p:nvPr/>
-        </p:nvPicPr>
-        <p:blipFill>
-          <a:blip r:embed="rId3"/>
-          <a:stretch>
-            <a:fillRect/>
-          </a:stretch>
-        </p:blipFill>
-        <p:spPr>
-          <a:xfrm>
-            <a:off x="6656172" y="2316763"/>
-            <a:ext cx="4085969" cy="2869535"/>
-          </a:xfrm>
-          <a:prstGeom prst="rect">
-            <a:avLst/>
-          </a:prstGeom>
-        </p:spPr>
-      </p:pic>
-    </p:spTree>
-    <p:extLst>
-      <p:ext uri="{BB962C8B-B14F-4D97-AF65-F5344CB8AC3E}">
-        <p14:creationId xmlns:p14="http://schemas.microsoft.com/office/powerpoint/2010/main" val="712440794"/>
-      </p:ext>
-    </p:extLst>
-  </p:cSld>
-  <p:clrMapOvr>
-    <a:masterClrMapping/>
-  </p:clrMapOvr>
-  <p:timing>
-    <p:tnLst>
-      <p:par>
-        <p:cTn id="1" dur="indefinite" restart="never" nodeType="tmRoot"/>
-      </p:par>
-    </p:tnLst>
-  </p:timing>
-</p:sld>
-</file>
-
-<file path=ppt/slides/slide5.xml><?xml version="1.0" encoding="utf-8"?>
 <p:sld xmlns:a="http://schemas.openxmlformats.org/drawingml/2006/main" xmlns:r="http://schemas.openxmlformats.org/officeDocument/2006/relationships" xmlns:p="http://schemas.openxmlformats.org/presentationml/2006/main">
   <p:cSld>
     <p:bg>
